--- a/topic06/talk-3/ReactJS_04.pptx
+++ b/topic06/talk-3/ReactJS_04.pptx
@@ -5,7 +5,7 @@
     <p:sldMasterId id="2147483648" r:id="rId1"/>
   </p:sldMasterIdLst>
   <p:notesMasterIdLst>
-    <p:notesMasterId r:id="rId15"/>
+    <p:notesMasterId r:id="rId14"/>
   </p:notesMasterIdLst>
   <p:sldIdLst>
     <p:sldId id="650" r:id="rId2"/>
@@ -20,7 +20,6 @@
     <p:sldId id="658" r:id="rId11"/>
     <p:sldId id="654" r:id="rId12"/>
     <p:sldId id="655" r:id="rId13"/>
-    <p:sldId id="657" r:id="rId14"/>
   </p:sldIdLst>
   <p:sldSz cx="12192000" cy="6858000"/>
   <p:notesSz cx="6858000" cy="9144000"/>
@@ -7598,280 +7597,6 @@
 </p:sld>
 </file>
 
-<file path=ppt/slides/slide13.xml><?xml version="1.0" encoding="utf-8"?>
-<p:sld xmlns:a="http://schemas.openxmlformats.org/drawingml/2006/main" xmlns:r="http://schemas.openxmlformats.org/officeDocument/2006/relationships" xmlns:p="http://schemas.openxmlformats.org/presentationml/2006/main">
-  <p:cSld>
-    <p:spTree>
-      <p:nvGrpSpPr>
-        <p:cNvPr id="1" name=""/>
-        <p:cNvGrpSpPr/>
-        <p:nvPr/>
-      </p:nvGrpSpPr>
-      <p:grpSpPr>
-        <a:xfrm>
-          <a:off x="0" y="0"/>
-          <a:ext cx="0" cy="0"/>
-          <a:chOff x="0" y="0"/>
-          <a:chExt cx="0" cy="0"/>
-        </a:xfrm>
-      </p:grpSpPr>
-      <p:sp>
-        <p:nvSpPr>
-          <p:cNvPr id="28673" name="Title 1">
-            <a:extLst>
-              <a:ext uri="{FF2B5EF4-FFF2-40B4-BE49-F238E27FC236}">
-                <a16:creationId xmlns:a16="http://schemas.microsoft.com/office/drawing/2014/main" id="{69DC9B7B-7342-62E0-0BD5-2B18E2939607}"/>
-              </a:ext>
-            </a:extLst>
-          </p:cNvPr>
-          <p:cNvSpPr>
-            <a:spLocks noGrp="1" noChangeArrowheads="1"/>
-          </p:cNvSpPr>
-          <p:nvPr>
-            <p:ph type="title"/>
-          </p:nvPr>
-        </p:nvSpPr>
-        <p:spPr/>
-        <p:txBody>
-          <a:bodyPr/>
-          <a:lstStyle/>
-          <a:p>
-            <a:endParaRPr lang="en-US" altLang="en-US">
-              <a:ea typeface="ＭＳ Ｐゴシック" panose="020B0600070205080204" pitchFamily="34" charset="-128"/>
-            </a:endParaRPr>
-          </a:p>
-        </p:txBody>
-      </p:sp>
-      <p:sp>
-        <p:nvSpPr>
-          <p:cNvPr id="28674" name="Content Placeholder 2">
-            <a:extLst>
-              <a:ext uri="{FF2B5EF4-FFF2-40B4-BE49-F238E27FC236}">
-                <a16:creationId xmlns:a16="http://schemas.microsoft.com/office/drawing/2014/main" id="{15E1ED4A-A480-5387-6CDD-EA162A450CBD}"/>
-              </a:ext>
-            </a:extLst>
-          </p:cNvPr>
-          <p:cNvSpPr>
-            <a:spLocks noGrp="1" noChangeArrowheads="1"/>
-          </p:cNvSpPr>
-          <p:nvPr>
-            <p:ph idx="1"/>
-          </p:nvPr>
-        </p:nvSpPr>
-        <p:spPr/>
-        <p:txBody>
-          <a:bodyPr/>
-          <a:lstStyle/>
-          <a:p>
-            <a:endParaRPr lang="en-US" altLang="en-US">
-              <a:ea typeface="ＭＳ Ｐゴシック" panose="020B0600070205080204" pitchFamily="34" charset="-128"/>
-            </a:endParaRPr>
-          </a:p>
-        </p:txBody>
-      </p:sp>
-      <p:sp>
-        <p:nvSpPr>
-          <p:cNvPr id="28675" name="Slide Number Placeholder 3">
-            <a:extLst>
-              <a:ext uri="{FF2B5EF4-FFF2-40B4-BE49-F238E27FC236}">
-                <a16:creationId xmlns:a16="http://schemas.microsoft.com/office/drawing/2014/main" id="{9C383320-A76C-70E5-F070-4BD28ACADFB2}"/>
-              </a:ext>
-            </a:extLst>
-          </p:cNvPr>
-          <p:cNvSpPr>
-            <a:spLocks noGrp="1" noChangeArrowheads="1"/>
-          </p:cNvSpPr>
-          <p:nvPr>
-            <p:ph type="sldNum" sz="quarter" idx="12"/>
-          </p:nvPr>
-        </p:nvSpPr>
-        <p:spPr>
-          <a:noFill/>
-          <a:ln/>
-          <a:extLst>
-            <a:ext uri="{909E8E84-426E-40DD-AFC4-6F175D3DCCD1}">
-              <a14:hiddenFill xmlns:a14="http://schemas.microsoft.com/office/drawing/2010/main">
-                <a:solidFill>
-                  <a:srgbClr val="FFFFFF"/>
-                </a:solidFill>
-              </a14:hiddenFill>
-            </a:ext>
-            <a:ext uri="{91240B29-F687-4F45-9708-019B960494DF}">
-              <a14:hiddenLine xmlns:a14="http://schemas.microsoft.com/office/drawing/2010/main" w="9525">
-                <a:solidFill>
-                  <a:srgbClr val="000000"/>
-                </a:solidFill>
-                <a:miter lim="800000"/>
-                <a:headEnd/>
-                <a:tailEnd/>
-              </a14:hiddenLine>
-            </a:ext>
-          </a:extLst>
-        </p:spPr>
-        <p:txBody>
-          <a:bodyPr/>
-          <a:lstStyle>
-            <a:lvl1pPr>
-              <a:spcBef>
-                <a:spcPct val="20000"/>
-              </a:spcBef>
-              <a:buChar char="•"/>
-              <a:defRPr b="1">
-                <a:solidFill>
-                  <a:schemeClr val="tx1"/>
-                </a:solidFill>
-                <a:latin typeface="Arial" panose="020B0604020202020204" pitchFamily="34" charset="0"/>
-                <a:ea typeface="ＭＳ Ｐゴシック" panose="020B0600070205080204" pitchFamily="34" charset="-128"/>
-              </a:defRPr>
-            </a:lvl1pPr>
-            <a:lvl2pPr marL="742950" indent="-285750">
-              <a:spcBef>
-                <a:spcPct val="20000"/>
-              </a:spcBef>
-              <a:buChar char="–"/>
-              <a:defRPr b="1">
-                <a:solidFill>
-                  <a:schemeClr val="tx1"/>
-                </a:solidFill>
-                <a:latin typeface="Arial" panose="020B0604020202020204" pitchFamily="34" charset="0"/>
-                <a:ea typeface="ＭＳ Ｐゴシック" panose="020B0600070205080204" pitchFamily="34" charset="-128"/>
-              </a:defRPr>
-            </a:lvl2pPr>
-            <a:lvl3pPr marL="1143000" indent="-228600">
-              <a:spcBef>
-                <a:spcPct val="20000"/>
-              </a:spcBef>
-              <a:buChar char="•"/>
-              <a:defRPr b="1">
-                <a:solidFill>
-                  <a:schemeClr val="tx1"/>
-                </a:solidFill>
-                <a:latin typeface="Arial" panose="020B0604020202020204" pitchFamily="34" charset="0"/>
-                <a:ea typeface="ＭＳ Ｐゴシック" panose="020B0600070205080204" pitchFamily="34" charset="-128"/>
-              </a:defRPr>
-            </a:lvl3pPr>
-            <a:lvl4pPr marL="1600200" indent="-228600">
-              <a:spcBef>
-                <a:spcPct val="20000"/>
-              </a:spcBef>
-              <a:buChar char="–"/>
-              <a:defRPr b="1">
-                <a:solidFill>
-                  <a:schemeClr val="tx1"/>
-                </a:solidFill>
-                <a:latin typeface="Arial" panose="020B0604020202020204" pitchFamily="34" charset="0"/>
-                <a:ea typeface="ＭＳ Ｐゴシック" panose="020B0600070205080204" pitchFamily="34" charset="-128"/>
-              </a:defRPr>
-            </a:lvl4pPr>
-            <a:lvl5pPr marL="2057400" indent="-228600">
-              <a:spcBef>
-                <a:spcPct val="20000"/>
-              </a:spcBef>
-              <a:buChar char="»"/>
-              <a:defRPr b="1">
-                <a:solidFill>
-                  <a:schemeClr val="tx1"/>
-                </a:solidFill>
-                <a:latin typeface="Arial" panose="020B0604020202020204" pitchFamily="34" charset="0"/>
-                <a:ea typeface="ＭＳ Ｐゴシック" panose="020B0600070205080204" pitchFamily="34" charset="-128"/>
-              </a:defRPr>
-            </a:lvl5pPr>
-            <a:lvl6pPr marL="2514600" indent="-228600" eaLnBrk="0" fontAlgn="base" hangingPunct="0">
-              <a:spcBef>
-                <a:spcPct val="20000"/>
-              </a:spcBef>
-              <a:spcAft>
-                <a:spcPct val="0"/>
-              </a:spcAft>
-              <a:buChar char="»"/>
-              <a:defRPr b="1">
-                <a:solidFill>
-                  <a:schemeClr val="tx1"/>
-                </a:solidFill>
-                <a:latin typeface="Arial" panose="020B0604020202020204" pitchFamily="34" charset="0"/>
-                <a:ea typeface="ＭＳ Ｐゴシック" panose="020B0600070205080204" pitchFamily="34" charset="-128"/>
-              </a:defRPr>
-            </a:lvl6pPr>
-            <a:lvl7pPr marL="2971800" indent="-228600" eaLnBrk="0" fontAlgn="base" hangingPunct="0">
-              <a:spcBef>
-                <a:spcPct val="20000"/>
-              </a:spcBef>
-              <a:spcAft>
-                <a:spcPct val="0"/>
-              </a:spcAft>
-              <a:buChar char="»"/>
-              <a:defRPr b="1">
-                <a:solidFill>
-                  <a:schemeClr val="tx1"/>
-                </a:solidFill>
-                <a:latin typeface="Arial" panose="020B0604020202020204" pitchFamily="34" charset="0"/>
-                <a:ea typeface="ＭＳ Ｐゴシック" panose="020B0600070205080204" pitchFamily="34" charset="-128"/>
-              </a:defRPr>
-            </a:lvl7pPr>
-            <a:lvl8pPr marL="3429000" indent="-228600" eaLnBrk="0" fontAlgn="base" hangingPunct="0">
-              <a:spcBef>
-                <a:spcPct val="20000"/>
-              </a:spcBef>
-              <a:spcAft>
-                <a:spcPct val="0"/>
-              </a:spcAft>
-              <a:buChar char="»"/>
-              <a:defRPr b="1">
-                <a:solidFill>
-                  <a:schemeClr val="tx1"/>
-                </a:solidFill>
-                <a:latin typeface="Arial" panose="020B0604020202020204" pitchFamily="34" charset="0"/>
-                <a:ea typeface="ＭＳ Ｐゴシック" panose="020B0600070205080204" pitchFamily="34" charset="-128"/>
-              </a:defRPr>
-            </a:lvl8pPr>
-            <a:lvl9pPr marL="3886200" indent="-228600" eaLnBrk="0" fontAlgn="base" hangingPunct="0">
-              <a:spcBef>
-                <a:spcPct val="20000"/>
-              </a:spcBef>
-              <a:spcAft>
-                <a:spcPct val="0"/>
-              </a:spcAft>
-              <a:buChar char="»"/>
-              <a:defRPr b="1">
-                <a:solidFill>
-                  <a:schemeClr val="tx1"/>
-                </a:solidFill>
-                <a:latin typeface="Arial" panose="020B0604020202020204" pitchFamily="34" charset="0"/>
-                <a:ea typeface="ＭＳ Ｐゴシック" panose="020B0600070205080204" pitchFamily="34" charset="-128"/>
-              </a:defRPr>
-            </a:lvl9pPr>
-          </a:lstStyle>
-          <a:p>
-            <a:pPr>
-              <a:spcBef>
-                <a:spcPct val="0"/>
-              </a:spcBef>
-              <a:buFontTx/>
-              <a:buNone/>
-            </a:pPr>
-            <a:fld id="{DEA3619B-828E-429C-A6A6-D0D2524202CC}" type="slidenum">
-              <a:rPr lang="en-US" altLang="en-US" b="0" smtClean="0"/>
-              <a:pPr>
-                <a:spcBef>
-                  <a:spcPct val="0"/>
-                </a:spcBef>
-                <a:buFontTx/>
-                <a:buNone/>
-              </a:pPr>
-              <a:t>13</a:t>
-            </a:fld>
-            <a:endParaRPr lang="en-US" altLang="en-US" b="0"/>
-          </a:p>
-        </p:txBody>
-      </p:sp>
-    </p:spTree>
-  </p:cSld>
-  <p:clrMapOvr>
-    <a:masterClrMapping/>
-  </p:clrMapOvr>
-</p:sld>
-</file>
-
 <file path=ppt/slides/slide2.xml><?xml version="1.0" encoding="utf-8"?>
 <p:sld xmlns:a="http://schemas.openxmlformats.org/drawingml/2006/main" xmlns:r="http://schemas.openxmlformats.org/officeDocument/2006/relationships" xmlns:p="http://schemas.openxmlformats.org/presentationml/2006/main">
   <p:cSld>
@@ -7951,20 +7676,17 @@
               <a:rPr lang="en-US" altLang="en-US" sz="2000" dirty="0">
                 <a:ea typeface="ＭＳ Ｐゴシック" panose="020B0600070205080204" pitchFamily="34" charset="-128"/>
               </a:rPr>
-              <a:t>relationships, e.g. Car is an </a:t>
-            </a:r>
-            <a:r>
-              <a:rPr lang="en-US" altLang="en-US" sz="2000" dirty="0" err="1">
+              <a:t>relationships, e.g. Car is </a:t>
+            </a:r>
+            <a:r>
+              <a:rPr lang="en-US" altLang="en-US" sz="2000">
                 <a:ea typeface="ＭＳ Ｐゴシック" panose="020B0600070205080204" pitchFamily="34" charset="-128"/>
               </a:rPr>
-              <a:t>automabile</a:t>
-            </a:r>
-            <a:r>
-              <a:rPr lang="en-US" altLang="en-US" sz="2000" dirty="0">
-                <a:ea typeface="ＭＳ Ｐゴシック" panose="020B0600070205080204" pitchFamily="34" charset="-128"/>
-              </a:rPr>
-              <a:t>)</a:t>
-            </a:r>
+              <a:t>an automabile)</a:t>
+            </a:r>
+            <a:endParaRPr lang="en-US" altLang="en-US" sz="2000" dirty="0">
+              <a:ea typeface="ＭＳ Ｐゴシック" panose="020B0600070205080204" pitchFamily="34" charset="-128"/>
+            </a:endParaRPr>
           </a:p>
           <a:p>
             <a:pPr marL="857250" lvl="1" indent="-457200">
@@ -7997,22 +7719,16 @@
           </a:p>
           <a:p>
             <a:r>
+              <a:rPr lang="en-US" altLang="en-US" sz="2000">
+                <a:ea typeface="ＭＳ Ｐゴシック" panose="020B0600070205080204" pitchFamily="34" charset="-128"/>
+              </a:rPr>
+              <a:t>React favours </a:t>
+            </a:r>
+            <a:r>
               <a:rPr lang="en-US" altLang="en-US" sz="2000" dirty="0">
                 <a:ea typeface="ＭＳ Ｐゴシック" panose="020B0600070205080204" pitchFamily="34" charset="-128"/>
               </a:rPr>
-              <a:t>React </a:t>
-            </a:r>
-            <a:r>
-              <a:rPr lang="en-US" altLang="en-US" sz="2000" dirty="0" err="1">
-                <a:ea typeface="ＭＳ Ｐゴシック" panose="020B0600070205080204" pitchFamily="34" charset="-128"/>
-              </a:rPr>
-              <a:t>favours</a:t>
-            </a:r>
-            <a:r>
-              <a:rPr lang="en-US" altLang="en-US" sz="2000" dirty="0">
-                <a:ea typeface="ＭＳ Ｐゴシック" panose="020B0600070205080204" pitchFamily="34" charset="-128"/>
-              </a:rPr>
-              <a:t> composition.</a:t>
+              <a:t>composition.</a:t>
             </a:r>
           </a:p>
           <a:p>
@@ -9991,8 +9707,8 @@
           </a:p>
         </p:txBody>
       </p:sp>
-      <mc:AlternateContent xmlns:mc="http://schemas.openxmlformats.org/markup-compatibility/2006">
-        <mc:Choice xmlns:p14="http://schemas.microsoft.com/office/powerpoint/2010/main" Requires="p14">
+      <mc:AlternateContent xmlns:mc="http://schemas.openxmlformats.org/markup-compatibility/2006" xmlns:p14="http://schemas.microsoft.com/office/powerpoint/2010/main">
+        <mc:Choice Requires="p14">
           <p:contentPart p14:bwMode="auto" r:id="rId7">
             <p14:nvContentPartPr>
               <p14:cNvPr id="19" name="Ink 18">
@@ -10011,7 +9727,7 @@
             </p14:xfrm>
           </p:contentPart>
         </mc:Choice>
-        <mc:Fallback>
+        <mc:Fallback xmlns="">
           <p:pic>
             <p:nvPicPr>
               <p:cNvPr id="19" name="Ink 18">
@@ -10042,8 +9758,8 @@
           </p:pic>
         </mc:Fallback>
       </mc:AlternateContent>
-      <mc:AlternateContent xmlns:mc="http://schemas.openxmlformats.org/markup-compatibility/2006">
-        <mc:Choice xmlns:p14="http://schemas.microsoft.com/office/powerpoint/2010/main" Requires="p14">
+      <mc:AlternateContent xmlns:mc="http://schemas.openxmlformats.org/markup-compatibility/2006" xmlns:p14="http://schemas.microsoft.com/office/powerpoint/2010/main">
+        <mc:Choice Requires="p14">
           <p:contentPart p14:bwMode="auto" r:id="rId9">
             <p14:nvContentPartPr>
               <p14:cNvPr id="20" name="Ink 19">
@@ -10062,7 +9778,7 @@
             </p14:xfrm>
           </p:contentPart>
         </mc:Choice>
-        <mc:Fallback>
+        <mc:Fallback xmlns="">
           <p:pic>
             <p:nvPicPr>
               <p:cNvPr id="20" name="Ink 19">
@@ -10093,8 +9809,8 @@
           </p:pic>
         </mc:Fallback>
       </mc:AlternateContent>
-      <mc:AlternateContent xmlns:mc="http://schemas.openxmlformats.org/markup-compatibility/2006">
-        <mc:Choice xmlns:p14="http://schemas.microsoft.com/office/powerpoint/2010/main" Requires="p14">
+      <mc:AlternateContent xmlns:mc="http://schemas.openxmlformats.org/markup-compatibility/2006" xmlns:p14="http://schemas.microsoft.com/office/powerpoint/2010/main">
+        <mc:Choice Requires="p14">
           <p:contentPart p14:bwMode="auto" r:id="rId11">
             <p14:nvContentPartPr>
               <p14:cNvPr id="21" name="Ink 20">
@@ -10113,7 +9829,7 @@
             </p14:xfrm>
           </p:contentPart>
         </mc:Choice>
-        <mc:Fallback>
+        <mc:Fallback xmlns="">
           <p:pic>
             <p:nvPicPr>
               <p:cNvPr id="21" name="Ink 20">
@@ -13913,8 +13629,8 @@
           </a:prstGeom>
         </p:spPr>
       </p:pic>
-      <mc:AlternateContent xmlns:mc="http://schemas.openxmlformats.org/markup-compatibility/2006">
-        <mc:Choice xmlns:p14="http://schemas.microsoft.com/office/powerpoint/2010/main" Requires="p14">
+      <mc:AlternateContent xmlns:mc="http://schemas.openxmlformats.org/markup-compatibility/2006" xmlns:p14="http://schemas.microsoft.com/office/powerpoint/2010/main">
+        <mc:Choice Requires="p14">
           <p:contentPart p14:bwMode="auto" r:id="rId5">
             <p14:nvContentPartPr>
               <p14:cNvPr id="4" name="Ink 3">
@@ -13933,7 +13649,7 @@
             </p14:xfrm>
           </p:contentPart>
         </mc:Choice>
-        <mc:Fallback>
+        <mc:Fallback xmlns="">
           <p:pic>
             <p:nvPicPr>
               <p:cNvPr id="4" name="Ink 3">
@@ -13964,8 +13680,8 @@
           </p:pic>
         </mc:Fallback>
       </mc:AlternateContent>
-      <mc:AlternateContent xmlns:mc="http://schemas.openxmlformats.org/markup-compatibility/2006">
-        <mc:Choice xmlns:p14="http://schemas.microsoft.com/office/powerpoint/2010/main" Requires="p14">
+      <mc:AlternateContent xmlns:mc="http://schemas.openxmlformats.org/markup-compatibility/2006" xmlns:p14="http://schemas.microsoft.com/office/powerpoint/2010/main">
+        <mc:Choice Requires="p14">
           <p:contentPart p14:bwMode="auto" r:id="rId7">
             <p14:nvContentPartPr>
               <p14:cNvPr id="6" name="Ink 5">
@@ -13984,7 +13700,7 @@
             </p14:xfrm>
           </p:contentPart>
         </mc:Choice>
-        <mc:Fallback>
+        <mc:Fallback xmlns="">
           <p:pic>
             <p:nvPicPr>
               <p:cNvPr id="6" name="Ink 5">
@@ -14015,8 +13731,8 @@
           </p:pic>
         </mc:Fallback>
       </mc:AlternateContent>
-      <mc:AlternateContent xmlns:mc="http://schemas.openxmlformats.org/markup-compatibility/2006">
-        <mc:Choice xmlns:p14="http://schemas.microsoft.com/office/powerpoint/2010/main" Requires="p14">
+      <mc:AlternateContent xmlns:mc="http://schemas.openxmlformats.org/markup-compatibility/2006" xmlns:p14="http://schemas.microsoft.com/office/powerpoint/2010/main">
+        <mc:Choice Requires="p14">
           <p:contentPart p14:bwMode="auto" r:id="rId9">
             <p14:nvContentPartPr>
               <p14:cNvPr id="7" name="Ink 6">
@@ -14035,7 +13751,7 @@
             </p14:xfrm>
           </p:contentPart>
         </mc:Choice>
-        <mc:Fallback>
+        <mc:Fallback xmlns="">
           <p:pic>
             <p:nvPicPr>
               <p:cNvPr id="7" name="Ink 6">

--- a/topic06/talk-3/ReactJS_04.pptx
+++ b/topic06/talk-3/ReactJS_04.pptx
@@ -7676,17 +7676,20 @@
               <a:rPr lang="en-US" altLang="en-US" sz="2000" dirty="0">
                 <a:ea typeface="ＭＳ Ｐゴシック" panose="020B0600070205080204" pitchFamily="34" charset="-128"/>
               </a:rPr>
-              <a:t>relationships, e.g. Car is </a:t>
-            </a:r>
-            <a:r>
-              <a:rPr lang="en-US" altLang="en-US" sz="2000">
+              <a:t>relationships, e.g. Car is an </a:t>
+            </a:r>
+            <a:r>
+              <a:rPr lang="en-US" altLang="en-US" sz="2000" dirty="0" err="1">
                 <a:ea typeface="ＭＳ Ｐゴシック" panose="020B0600070205080204" pitchFamily="34" charset="-128"/>
               </a:rPr>
-              <a:t>an automabile)</a:t>
-            </a:r>
-            <a:endParaRPr lang="en-US" altLang="en-US" sz="2000" dirty="0">
-              <a:ea typeface="ＭＳ Ｐゴシック" panose="020B0600070205080204" pitchFamily="34" charset="-128"/>
-            </a:endParaRPr>
+              <a:t>automabile</a:t>
+            </a:r>
+            <a:r>
+              <a:rPr lang="en-US" altLang="en-US" sz="2000" dirty="0">
+                <a:ea typeface="ＭＳ Ｐゴシック" panose="020B0600070205080204" pitchFamily="34" charset="-128"/>
+              </a:rPr>
+              <a:t>)</a:t>
+            </a:r>
           </a:p>
           <a:p>
             <a:pPr marL="857250" lvl="1" indent="-457200">
@@ -7719,16 +7722,22 @@
           </a:p>
           <a:p>
             <a:r>
-              <a:rPr lang="en-US" altLang="en-US" sz="2000">
+              <a:rPr lang="en-US" altLang="en-US" sz="2000" dirty="0">
                 <a:ea typeface="ＭＳ Ｐゴシック" panose="020B0600070205080204" pitchFamily="34" charset="-128"/>
               </a:rPr>
-              <a:t>React favours </a:t>
+              <a:t>React </a:t>
+            </a:r>
+            <a:r>
+              <a:rPr lang="en-US" altLang="en-US" sz="2000" dirty="0" err="1">
+                <a:ea typeface="ＭＳ Ｐゴシック" panose="020B0600070205080204" pitchFamily="34" charset="-128"/>
+              </a:rPr>
+              <a:t>favours</a:t>
             </a:r>
             <a:r>
               <a:rPr lang="en-US" altLang="en-US" sz="2000" dirty="0">
                 <a:ea typeface="ＭＳ Ｐゴシック" panose="020B0600070205080204" pitchFamily="34" charset="-128"/>
               </a:rPr>
-              <a:t>composition.</a:t>
+              <a:t> composition.</a:t>
             </a:r>
           </a:p>
           <a:p>
@@ -7748,7 +7757,7 @@
               <a:rPr lang="en-US" altLang="en-US" sz="2000" dirty="0">
                 <a:ea typeface="ＭＳ Ｐゴシック" panose="020B0600070205080204" pitchFamily="34" charset="-128"/>
               </a:rPr>
-              <a:t>Container.</a:t>
+              <a:t>Container</a:t>
             </a:r>
           </a:p>
           <a:p>
@@ -7760,7 +7769,7 @@
               <a:rPr lang="en-US" altLang="en-US" sz="2000" dirty="0">
                 <a:ea typeface="ＭＳ Ｐゴシック" panose="020B0600070205080204" pitchFamily="34" charset="-128"/>
               </a:rPr>
-              <a:t>Render Props.</a:t>
+              <a:t>Render Props</a:t>
             </a:r>
           </a:p>
           <a:p>
@@ -7772,7 +7781,7 @@
               <a:rPr lang="en-US" altLang="en-US" sz="2000" dirty="0">
                 <a:ea typeface="ＭＳ Ｐゴシック" panose="020B0600070205080204" pitchFamily="34" charset="-128"/>
               </a:rPr>
-              <a:t>Higher Order Components.</a:t>
+              <a:t>Higher Order Components</a:t>
             </a:r>
           </a:p>
           <a:p>
@@ -9088,6 +9097,66 @@
           <a:chExt cx="0" cy="0"/>
         </a:xfrm>
       </p:grpSpPr>
+      <p:pic>
+        <p:nvPicPr>
+          <p:cNvPr id="4" name="Picture 3">
+            <a:extLst>
+              <a:ext uri="{FF2B5EF4-FFF2-40B4-BE49-F238E27FC236}">
+                <a16:creationId xmlns:a16="http://schemas.microsoft.com/office/drawing/2014/main" id="{4EBEA2AA-A336-1F8C-E3E5-8307813A2557}"/>
+              </a:ext>
+            </a:extLst>
+          </p:cNvPr>
+          <p:cNvPicPr>
+            <a:picLocks noChangeAspect="1"/>
+          </p:cNvPicPr>
+          <p:nvPr/>
+        </p:nvPicPr>
+        <p:blipFill>
+          <a:blip r:embed="rId2"/>
+          <a:stretch>
+            <a:fillRect/>
+          </a:stretch>
+        </p:blipFill>
+        <p:spPr>
+          <a:xfrm>
+            <a:off x="609600" y="2793374"/>
+            <a:ext cx="4615133" cy="1209360"/>
+          </a:xfrm>
+          <a:prstGeom prst="rect">
+            <a:avLst/>
+          </a:prstGeom>
+        </p:spPr>
+      </p:pic>
+      <p:pic>
+        <p:nvPicPr>
+          <p:cNvPr id="6" name="Picture 5">
+            <a:extLst>
+              <a:ext uri="{FF2B5EF4-FFF2-40B4-BE49-F238E27FC236}">
+                <a16:creationId xmlns:a16="http://schemas.microsoft.com/office/drawing/2014/main" id="{64F3842E-7101-3F32-ABCD-E744B4AB75D6}"/>
+              </a:ext>
+            </a:extLst>
+          </p:cNvPr>
+          <p:cNvPicPr>
+            <a:picLocks noChangeAspect="1"/>
+          </p:cNvPicPr>
+          <p:nvPr/>
+        </p:nvPicPr>
+        <p:blipFill>
+          <a:blip r:embed="rId3"/>
+          <a:stretch>
+            <a:fillRect/>
+          </a:stretch>
+        </p:blipFill>
+        <p:spPr>
+          <a:xfrm>
+            <a:off x="5577892" y="2819949"/>
+            <a:ext cx="6365875" cy="1150325"/>
+          </a:xfrm>
+          <a:prstGeom prst="rect">
+            <a:avLst/>
+          </a:prstGeom>
+        </p:spPr>
+      </p:pic>
       <p:sp>
         <p:nvSpPr>
           <p:cNvPr id="19457" name="Content Placeholder 2">
@@ -9526,7 +9595,7 @@
       </p:sp>
       <mc:AlternateContent xmlns:mc="http://schemas.openxmlformats.org/markup-compatibility/2006" xmlns:p14="http://schemas.microsoft.com/office/powerpoint/2010/main">
         <mc:Choice Requires="p14">
-          <p:contentPart p14:bwMode="auto" r:id="rId2">
+          <p:contentPart p14:bwMode="auto" r:id="rId4">
             <p14:nvContentPartPr>
               <p14:cNvPr id="2" name="Ink 1">
                 <a:extLst>
@@ -9558,7 +9627,7 @@
               <p:nvPr/>
             </p:nvPicPr>
             <p:blipFill>
-              <a:blip r:embed="rId4"/>
+              <a:blip r:embed="rId5"/>
               <a:stretch>
                 <a:fillRect/>
               </a:stretch>
@@ -9575,66 +9644,6 @@
           </p:pic>
         </mc:Fallback>
       </mc:AlternateContent>
-      <p:pic>
-        <p:nvPicPr>
-          <p:cNvPr id="10" name="Picture 9">
-            <a:extLst>
-              <a:ext uri="{FF2B5EF4-FFF2-40B4-BE49-F238E27FC236}">
-                <a16:creationId xmlns:a16="http://schemas.microsoft.com/office/drawing/2014/main" id="{64DEBC80-F270-8F64-C85A-E352F833A3FF}"/>
-              </a:ext>
-            </a:extLst>
-          </p:cNvPr>
-          <p:cNvPicPr>
-            <a:picLocks noChangeAspect="1"/>
-          </p:cNvPicPr>
-          <p:nvPr/>
-        </p:nvPicPr>
-        <p:blipFill>
-          <a:blip r:embed="rId5"/>
-          <a:stretch>
-            <a:fillRect/>
-          </a:stretch>
-        </p:blipFill>
-        <p:spPr>
-          <a:xfrm>
-            <a:off x="784019" y="2686012"/>
-            <a:ext cx="3892750" cy="1485976"/>
-          </a:xfrm>
-          <a:prstGeom prst="rect">
-            <a:avLst/>
-          </a:prstGeom>
-        </p:spPr>
-      </p:pic>
-      <p:pic>
-        <p:nvPicPr>
-          <p:cNvPr id="12" name="Picture 11">
-            <a:extLst>
-              <a:ext uri="{FF2B5EF4-FFF2-40B4-BE49-F238E27FC236}">
-                <a16:creationId xmlns:a16="http://schemas.microsoft.com/office/drawing/2014/main" id="{0B4CAEB6-4EC7-065C-082D-A4A589C85F69}"/>
-              </a:ext>
-            </a:extLst>
-          </p:cNvPr>
-          <p:cNvPicPr>
-            <a:picLocks noChangeAspect="1"/>
-          </p:cNvPicPr>
-          <p:nvPr/>
-        </p:nvPicPr>
-        <p:blipFill>
-          <a:blip r:embed="rId6"/>
-          <a:stretch>
-            <a:fillRect/>
-          </a:stretch>
-        </p:blipFill>
-        <p:spPr>
-          <a:xfrm>
-            <a:off x="5410200" y="2568531"/>
-            <a:ext cx="6369377" cy="1720938"/>
-          </a:xfrm>
-          <a:prstGeom prst="rect">
-            <a:avLst/>
-          </a:prstGeom>
-        </p:spPr>
-      </p:pic>
       <p:sp>
         <p:nvSpPr>
           <p:cNvPr id="13" name="TextBox 12">
@@ -9686,7 +9695,7 @@
         <p:spPr>
           <a:xfrm>
             <a:off x="7424567" y="2193494"/>
-            <a:ext cx="2672526" cy="369332"/>
+            <a:ext cx="2377574" cy="369332"/>
           </a:xfrm>
           <a:prstGeom prst="rect">
             <a:avLst/>
@@ -9701,7 +9710,7 @@
           <a:p>
             <a:r>
               <a:rPr lang="en-IE" dirty="0" err="1"/>
-              <a:t>demoComponent.tsc.tsx</a:t>
+              <a:t>demoComponent.tsx</a:t>
             </a:r>
             <a:endParaRPr lang="en-IE" dirty="0"/>
           </a:p>
@@ -9709,7 +9718,7 @@
       </p:sp>
       <mc:AlternateContent xmlns:mc="http://schemas.openxmlformats.org/markup-compatibility/2006" xmlns:p14="http://schemas.microsoft.com/office/powerpoint/2010/main">
         <mc:Choice Requires="p14">
-          <p:contentPart p14:bwMode="auto" r:id="rId7">
+          <p:contentPart p14:bwMode="auto" r:id="rId6">
             <p14:nvContentPartPr>
               <p14:cNvPr id="19" name="Ink 18">
                 <a:extLst>
@@ -9809,8 +9818,8 @@
           </p:pic>
         </mc:Fallback>
       </mc:AlternateContent>
-      <mc:AlternateContent xmlns:mc="http://schemas.openxmlformats.org/markup-compatibility/2006" xmlns:p14="http://schemas.microsoft.com/office/powerpoint/2010/main">
-        <mc:Choice Requires="p14">
+      <mc:AlternateContent xmlns:mc="http://schemas.openxmlformats.org/markup-compatibility/2006">
+        <mc:Choice xmlns:p14="http://schemas.microsoft.com/office/powerpoint/2010/main" Requires="p14">
           <p:contentPart p14:bwMode="auto" r:id="rId11">
             <p14:nvContentPartPr>
               <p14:cNvPr id="21" name="Ink 20">
@@ -9824,12 +9833,12 @@
               <p14:nvPr/>
             </p14:nvContentPartPr>
             <p14:xfrm>
-              <a:off x="6940010" y="2835078"/>
+              <a:off x="6597173" y="3075053"/>
               <a:ext cx="3499920" cy="949320"/>
             </p14:xfrm>
           </p:contentPart>
         </mc:Choice>
-        <mc:Fallback xmlns="">
+        <mc:Fallback>
           <p:pic>
             <p:nvPicPr>
               <p:cNvPr id="21" name="Ink 20">
@@ -9850,7 +9859,7 @@
             </p:blipFill>
             <p:spPr>
               <a:xfrm>
-                <a:off x="6931370" y="2826078"/>
+                <a:off x="6588173" y="3066053"/>
                 <a:ext cx="3517560" cy="966960"/>
               </a:xfrm>
               <a:prstGeom prst="rect">
@@ -12776,7 +12785,7 @@
           <a:lstStyle/>
           <a:p>
             <a:r>
-              <a:rPr lang="en-US" altLang="en-US" sz="2000">
+              <a:rPr lang="en-US" altLang="en-US" sz="2000" dirty="0">
                 <a:ea typeface="ＭＳ Ｐゴシック" panose="020B0600070205080204" pitchFamily="34" charset="-128"/>
               </a:rPr>
               <a:t>Updates to design: </a:t>
@@ -12788,37 +12797,37 @@
               <a:buAutoNum type="arabicPeriod"/>
             </a:pPr>
             <a:r>
-              <a:rPr lang="en-US" altLang="en-US" sz="2000" b="0">
+              <a:rPr lang="en-US" altLang="en-US" sz="2000" b="0" dirty="0" err="1">
                 <a:ea typeface="ＭＳ Ｐゴシック" panose="020B0600070205080204" pitchFamily="34" charset="-128"/>
               </a:rPr>
               <a:t>FriendsApp</a:t>
             </a:r>
             <a:r>
-              <a:rPr lang="en-US" altLang="en-US" sz="2000">
+              <a:rPr lang="en-US" altLang="en-US" sz="2000" dirty="0">
                 <a:ea typeface="ＭＳ Ｐゴシック" panose="020B0600070205080204" pitchFamily="34" charset="-128"/>
               </a:rPr>
               <a:t> passes a render-prop to </a:t>
             </a:r>
             <a:r>
-              <a:rPr lang="en-US" altLang="en-US" sz="2000" b="0">
+              <a:rPr lang="en-US" altLang="en-US" sz="2000" b="0" dirty="0" err="1">
                 <a:ea typeface="ＭＳ Ｐゴシック" panose="020B0600070205080204" pitchFamily="34" charset="-128"/>
               </a:rPr>
               <a:t>FilteredFriendList</a:t>
             </a:r>
             <a:r>
-              <a:rPr lang="en-US" altLang="en-US" sz="2000">
+              <a:rPr lang="en-US" altLang="en-US" sz="2000" dirty="0">
                 <a:ea typeface="ＭＳ Ｐゴシック" panose="020B0600070205080204" pitchFamily="34" charset="-128"/>
               </a:rPr>
               <a:t>, indicating </a:t>
             </a:r>
             <a:r>
-              <a:rPr lang="en-US" altLang="en-US" sz="2000" b="0" u="sng">
+              <a:rPr lang="en-US" altLang="en-US" sz="2000" b="0" u="sng" dirty="0">
                 <a:ea typeface="ＭＳ Ｐゴシック" panose="020B0600070205080204" pitchFamily="34" charset="-128"/>
               </a:rPr>
               <a:t>how</a:t>
             </a:r>
             <a:r>
-              <a:rPr lang="en-US" altLang="en-US" sz="2000">
+              <a:rPr lang="en-US" altLang="en-US" sz="2000" dirty="0">
                 <a:ea typeface="ＭＳ Ｐゴシック" panose="020B0600070205080204" pitchFamily="34" charset="-128"/>
               </a:rPr>
               <a:t> Friends should be rendered.</a:t>
@@ -12830,19 +12839,19 @@
               <a:buAutoNum type="arabicPeriod"/>
             </a:pPr>
             <a:r>
-              <a:rPr lang="en-US" altLang="en-US" sz="2000">
+              <a:rPr lang="en-US" altLang="en-US" sz="2000" dirty="0">
                 <a:ea typeface="ＭＳ Ｐゴシック" panose="020B0600070205080204" pitchFamily="34" charset="-128"/>
               </a:rPr>
               <a:t>Remove static import of Friend component type from </a:t>
             </a:r>
             <a:r>
-              <a:rPr lang="en-US" altLang="en-US" sz="2000" b="0">
+              <a:rPr lang="en-US" altLang="en-US" sz="2000" b="0" dirty="0" err="1">
                 <a:ea typeface="ＭＳ Ｐゴシック" panose="020B0600070205080204" pitchFamily="34" charset="-128"/>
               </a:rPr>
               <a:t>FilteredFriendList</a:t>
             </a:r>
             <a:r>
-              <a:rPr lang="en-US" altLang="en-US" sz="2000">
+              <a:rPr lang="en-US" altLang="en-US" sz="2000" dirty="0">
                 <a:ea typeface="ＭＳ Ｐゴシック" panose="020B0600070205080204" pitchFamily="34" charset="-128"/>
               </a:rPr>
               <a:t>.</a:t>
@@ -13104,7 +13113,7 @@
         </p:blipFill>
         <p:spPr bwMode="auto">
           <a:xfrm>
-            <a:off x="1981200" y="1449388"/>
+            <a:off x="381000" y="1399103"/>
             <a:ext cx="3429000" cy="4000500"/>
           </a:xfrm>
           <a:prstGeom prst="rect">
